--- a/Stochastic_Option_Pricing_Presentation_v3.pptx
+++ b/Stochastic_Option_Pricing_Presentation_v3.pptx
@@ -5,34 +5,34 @@
     <p:sldMasterId id="2147483648" r:id="rId1"/>
   </p:sldMasterIdLst>
   <p:sldIdLst>
-    <p:sldId id="256" r:id="rId7"/>
-    <p:sldId id="257" r:id="rId8"/>
-    <p:sldId id="258" r:id="rId9"/>
-    <p:sldId id="259" r:id="rId10"/>
-    <p:sldId id="260" r:id="rId11"/>
-    <p:sldId id="261" r:id="rId12"/>
-    <p:sldId id="262" r:id="rId13"/>
-    <p:sldId id="263" r:id="rId14"/>
-    <p:sldId id="264" r:id="rId15"/>
-    <p:sldId id="265" r:id="rId16"/>
-    <p:sldId id="266" r:id="rId17"/>
-    <p:sldId id="267" r:id="rId18"/>
-    <p:sldId id="268" r:id="rId19"/>
-    <p:sldId id="269" r:id="rId20"/>
-    <p:sldId id="270" r:id="rId21"/>
-    <p:sldId id="271" r:id="rId22"/>
-    <p:sldId id="272" r:id="rId23"/>
-    <p:sldId id="273" r:id="rId24"/>
-    <p:sldId id="274" r:id="rId25"/>
-    <p:sldId id="275" r:id="rId26"/>
-    <p:sldId id="276" r:id="rId27"/>
-    <p:sldId id="277" r:id="rId28"/>
-    <p:sldId id="278" r:id="rId29"/>
-    <p:sldId id="279" r:id="rId30"/>
-    <p:sldId id="280" r:id="rId31"/>
-    <p:sldId id="281" r:id="rId32"/>
+    <p:sldId id="256" r:id="rId2"/>
+    <p:sldId id="257" r:id="rId3"/>
+    <p:sldId id="258" r:id="rId4"/>
+    <p:sldId id="259" r:id="rId5"/>
+    <p:sldId id="260" r:id="rId6"/>
+    <p:sldId id="261" r:id="rId7"/>
+    <p:sldId id="262" r:id="rId8"/>
+    <p:sldId id="263" r:id="rId9"/>
+    <p:sldId id="264" r:id="rId10"/>
+    <p:sldId id="265" r:id="rId11"/>
+    <p:sldId id="266" r:id="rId12"/>
+    <p:sldId id="267" r:id="rId13"/>
+    <p:sldId id="268" r:id="rId14"/>
+    <p:sldId id="269" r:id="rId15"/>
+    <p:sldId id="270" r:id="rId16"/>
+    <p:sldId id="271" r:id="rId17"/>
+    <p:sldId id="272" r:id="rId18"/>
+    <p:sldId id="273" r:id="rId19"/>
+    <p:sldId id="274" r:id="rId20"/>
+    <p:sldId id="275" r:id="rId21"/>
+    <p:sldId id="276" r:id="rId22"/>
+    <p:sldId id="277" r:id="rId23"/>
+    <p:sldId id="278" r:id="rId24"/>
+    <p:sldId id="279" r:id="rId25"/>
+    <p:sldId id="280" r:id="rId26"/>
+    <p:sldId id="281" r:id="rId27"/>
   </p:sldIdLst>
-  <p:sldSz cx="12191695" cy="6858000" type="screen4x3"/>
+  <p:sldSz cx="12192000" cy="6858000"/>
   <p:notesSz cx="6858000" cy="9144000"/>
   <p:defaultTextStyle>
     <a:defPPr>
@@ -129,6 +129,22 @@
       </a:defRPr>
     </a:lvl9pPr>
   </p:defaultTextStyle>
+  <p:extLst>
+    <p:ext uri="{EFAFB233-063F-42B5-8137-9DF3F51BA10A}">
+      <p15:sldGuideLst xmlns:p15="http://schemas.microsoft.com/office/powerpoint/2012/main">
+        <p15:guide id="1" orient="horz" pos="2160">
+          <p15:clr>
+            <a:srgbClr val="A4A3A4"/>
+          </p15:clr>
+        </p15:guide>
+        <p15:guide id="2" pos="2880">
+          <p15:clr>
+            <a:srgbClr val="A4A3A4"/>
+          </p15:clr>
+        </p15:guide>
+      </p15:sldGuideLst>
+    </p:ext>
+  </p:extLst>
 </p:presentation>
 </file>
 
@@ -170,10 +186,9 @@
           <a:lstStyle/>
           <a:p>
             <a:r>
-              <a:rPr lang="en-US" smtClean="0"/>
+              <a:rPr lang="en-US"/>
               <a:t>Click to edit Master title style</a:t>
             </a:r>
-            <a:endParaRPr lang="en-US"/>
           </a:p>
         </p:txBody>
       </p:sp>
@@ -289,10 +304,9 @@
           </a:lstStyle>
           <a:p>
             <a:r>
-              <a:rPr lang="en-US" smtClean="0"/>
+              <a:rPr lang="en-US"/>
               <a:t>Click to edit Master subtitle style</a:t>
             </a:r>
-            <a:endParaRPr lang="en-US"/>
           </a:p>
         </p:txBody>
       </p:sp>
@@ -313,7 +327,7 @@
           <a:p>
             <a:fld id="{5BCAD085-E8A6-8845-BD4E-CB4CCA059FC4}" type="datetimeFigureOut">
               <a:rPr lang="en-US" smtClean="0"/>
-              <a:t>1/27/13</a:t>
+              <a:t>3/18/2026</a:t>
             </a:fld>
             <a:endParaRPr lang="en-US"/>
           </a:p>
@@ -407,10 +421,9 @@
           <a:lstStyle/>
           <a:p>
             <a:r>
-              <a:rPr lang="en-US" smtClean="0"/>
+              <a:rPr lang="en-US"/>
               <a:t>Click to edit Master title style</a:t>
             </a:r>
-            <a:endParaRPr lang="en-US"/>
           </a:p>
         </p:txBody>
       </p:sp>
@@ -431,38 +444,37 @@
           <a:p>
             <a:pPr lvl="0"/>
             <a:r>
-              <a:rPr lang="en-US" smtClean="0"/>
+              <a:rPr lang="en-US"/>
               <a:t>Click to edit Master text styles</a:t>
             </a:r>
           </a:p>
           <a:p>
             <a:pPr lvl="1"/>
             <a:r>
-              <a:rPr lang="en-US" smtClean="0"/>
+              <a:rPr lang="en-US"/>
               <a:t>Second level</a:t>
             </a:r>
           </a:p>
           <a:p>
             <a:pPr lvl="2"/>
             <a:r>
-              <a:rPr lang="en-US" smtClean="0"/>
+              <a:rPr lang="en-US"/>
               <a:t>Third level</a:t>
             </a:r>
           </a:p>
           <a:p>
             <a:pPr lvl="3"/>
             <a:r>
-              <a:rPr lang="en-US" smtClean="0"/>
+              <a:rPr lang="en-US"/>
               <a:t>Fourth level</a:t>
             </a:r>
           </a:p>
           <a:p>
             <a:pPr lvl="4"/>
             <a:r>
-              <a:rPr lang="en-US" smtClean="0"/>
+              <a:rPr lang="en-US"/>
               <a:t>Fifth level</a:t>
             </a:r>
-            <a:endParaRPr lang="en-US"/>
           </a:p>
         </p:txBody>
       </p:sp>
@@ -483,7 +495,7 @@
           <a:p>
             <a:fld id="{5BCAD085-E8A6-8845-BD4E-CB4CCA059FC4}" type="datetimeFigureOut">
               <a:rPr lang="en-US" smtClean="0"/>
-              <a:t>1/27/13</a:t>
+              <a:t>3/18/2026</a:t>
             </a:fld>
             <a:endParaRPr lang="en-US"/>
           </a:p>
@@ -582,10 +594,9 @@
           <a:lstStyle/>
           <a:p>
             <a:r>
-              <a:rPr lang="en-US" smtClean="0"/>
+              <a:rPr lang="en-US"/>
               <a:t>Click to edit Master title style</a:t>
             </a:r>
-            <a:endParaRPr lang="en-US"/>
           </a:p>
         </p:txBody>
       </p:sp>
@@ -611,38 +622,37 @@
           <a:p>
             <a:pPr lvl="0"/>
             <a:r>
-              <a:rPr lang="en-US" smtClean="0"/>
+              <a:rPr lang="en-US"/>
               <a:t>Click to edit Master text styles</a:t>
             </a:r>
           </a:p>
           <a:p>
             <a:pPr lvl="1"/>
             <a:r>
-              <a:rPr lang="en-US" smtClean="0"/>
+              <a:rPr lang="en-US"/>
               <a:t>Second level</a:t>
             </a:r>
           </a:p>
           <a:p>
             <a:pPr lvl="2"/>
             <a:r>
-              <a:rPr lang="en-US" smtClean="0"/>
+              <a:rPr lang="en-US"/>
               <a:t>Third level</a:t>
             </a:r>
           </a:p>
           <a:p>
             <a:pPr lvl="3"/>
             <a:r>
-              <a:rPr lang="en-US" smtClean="0"/>
+              <a:rPr lang="en-US"/>
               <a:t>Fourth level</a:t>
             </a:r>
           </a:p>
           <a:p>
             <a:pPr lvl="4"/>
             <a:r>
-              <a:rPr lang="en-US" smtClean="0"/>
+              <a:rPr lang="en-US"/>
               <a:t>Fifth level</a:t>
             </a:r>
-            <a:endParaRPr lang="en-US"/>
           </a:p>
         </p:txBody>
       </p:sp>
@@ -663,7 +673,7 @@
           <a:p>
             <a:fld id="{5BCAD085-E8A6-8845-BD4E-CB4CCA059FC4}" type="datetimeFigureOut">
               <a:rPr lang="en-US" smtClean="0"/>
-              <a:t>1/27/13</a:t>
+              <a:t>3/18/2026</a:t>
             </a:fld>
             <a:endParaRPr lang="en-US"/>
           </a:p>
@@ -757,10 +767,9 @@
           <a:lstStyle/>
           <a:p>
             <a:r>
-              <a:rPr lang="en-US" smtClean="0"/>
+              <a:rPr lang="en-US"/>
               <a:t>Click to edit Master title style</a:t>
             </a:r>
-            <a:endParaRPr lang="en-US"/>
           </a:p>
         </p:txBody>
       </p:sp>
@@ -781,38 +790,37 @@
           <a:p>
             <a:pPr lvl="0"/>
             <a:r>
-              <a:rPr lang="en-US" smtClean="0"/>
+              <a:rPr lang="en-US"/>
               <a:t>Click to edit Master text styles</a:t>
             </a:r>
           </a:p>
           <a:p>
             <a:pPr lvl="1"/>
             <a:r>
-              <a:rPr lang="en-US" smtClean="0"/>
+              <a:rPr lang="en-US"/>
               <a:t>Second level</a:t>
             </a:r>
           </a:p>
           <a:p>
             <a:pPr lvl="2"/>
             <a:r>
-              <a:rPr lang="en-US" smtClean="0"/>
+              <a:rPr lang="en-US"/>
               <a:t>Third level</a:t>
             </a:r>
           </a:p>
           <a:p>
             <a:pPr lvl="3"/>
             <a:r>
-              <a:rPr lang="en-US" smtClean="0"/>
+              <a:rPr lang="en-US"/>
               <a:t>Fourth level</a:t>
             </a:r>
           </a:p>
           <a:p>
             <a:pPr lvl="4"/>
             <a:r>
-              <a:rPr lang="en-US" smtClean="0"/>
+              <a:rPr lang="en-US"/>
               <a:t>Fifth level</a:t>
             </a:r>
-            <a:endParaRPr lang="en-US"/>
           </a:p>
         </p:txBody>
       </p:sp>
@@ -833,7 +841,7 @@
           <a:p>
             <a:fld id="{5BCAD085-E8A6-8845-BD4E-CB4CCA059FC4}" type="datetimeFigureOut">
               <a:rPr lang="en-US" smtClean="0"/>
-              <a:t>1/27/13</a:t>
+              <a:t>3/18/2026</a:t>
             </a:fld>
             <a:endParaRPr lang="en-US"/>
           </a:p>
@@ -936,10 +944,9 @@
           </a:lstStyle>
           <a:p>
             <a:r>
-              <a:rPr lang="en-US" smtClean="0"/>
+              <a:rPr lang="en-US"/>
               <a:t>Click to edit Master title style</a:t>
             </a:r>
-            <a:endParaRPr lang="en-US"/>
           </a:p>
         </p:txBody>
       </p:sp>
@@ -1056,7 +1063,7 @@
           <a:p>
             <a:pPr lvl="0"/>
             <a:r>
-              <a:rPr lang="en-US" smtClean="0"/>
+              <a:rPr lang="en-US"/>
               <a:t>Click to edit Master text styles</a:t>
             </a:r>
           </a:p>
@@ -1079,7 +1086,7 @@
           <a:p>
             <a:fld id="{5BCAD085-E8A6-8845-BD4E-CB4CCA059FC4}" type="datetimeFigureOut">
               <a:rPr lang="en-US" smtClean="0"/>
-              <a:t>1/27/13</a:t>
+              <a:t>3/18/2026</a:t>
             </a:fld>
             <a:endParaRPr lang="en-US"/>
           </a:p>
@@ -1173,10 +1180,9 @@
           <a:lstStyle/>
           <a:p>
             <a:r>
-              <a:rPr lang="en-US" smtClean="0"/>
+              <a:rPr lang="en-US"/>
               <a:t>Click to edit Master title style</a:t>
             </a:r>
-            <a:endParaRPr lang="en-US"/>
           </a:p>
         </p:txBody>
       </p:sp>
@@ -1230,38 +1236,37 @@
           <a:p>
             <a:pPr lvl="0"/>
             <a:r>
-              <a:rPr lang="en-US" smtClean="0"/>
+              <a:rPr lang="en-US"/>
               <a:t>Click to edit Master text styles</a:t>
             </a:r>
           </a:p>
           <a:p>
             <a:pPr lvl="1"/>
             <a:r>
-              <a:rPr lang="en-US" smtClean="0"/>
+              <a:rPr lang="en-US"/>
               <a:t>Second level</a:t>
             </a:r>
           </a:p>
           <a:p>
             <a:pPr lvl="2"/>
             <a:r>
-              <a:rPr lang="en-US" smtClean="0"/>
+              <a:rPr lang="en-US"/>
               <a:t>Third level</a:t>
             </a:r>
           </a:p>
           <a:p>
             <a:pPr lvl="3"/>
             <a:r>
-              <a:rPr lang="en-US" smtClean="0"/>
+              <a:rPr lang="en-US"/>
               <a:t>Fourth level</a:t>
             </a:r>
           </a:p>
           <a:p>
             <a:pPr lvl="4"/>
             <a:r>
-              <a:rPr lang="en-US" smtClean="0"/>
+              <a:rPr lang="en-US"/>
               <a:t>Fifth level</a:t>
             </a:r>
-            <a:endParaRPr lang="en-US"/>
           </a:p>
         </p:txBody>
       </p:sp>
@@ -1315,38 +1320,37 @@
           <a:p>
             <a:pPr lvl="0"/>
             <a:r>
-              <a:rPr lang="en-US" smtClean="0"/>
+              <a:rPr lang="en-US"/>
               <a:t>Click to edit Master text styles</a:t>
             </a:r>
           </a:p>
           <a:p>
             <a:pPr lvl="1"/>
             <a:r>
-              <a:rPr lang="en-US" smtClean="0"/>
+              <a:rPr lang="en-US"/>
               <a:t>Second level</a:t>
             </a:r>
           </a:p>
           <a:p>
             <a:pPr lvl="2"/>
             <a:r>
-              <a:rPr lang="en-US" smtClean="0"/>
+              <a:rPr lang="en-US"/>
               <a:t>Third level</a:t>
             </a:r>
           </a:p>
           <a:p>
             <a:pPr lvl="3"/>
             <a:r>
-              <a:rPr lang="en-US" smtClean="0"/>
+              <a:rPr lang="en-US"/>
               <a:t>Fourth level</a:t>
             </a:r>
           </a:p>
           <a:p>
             <a:pPr lvl="4"/>
             <a:r>
-              <a:rPr lang="en-US" smtClean="0"/>
+              <a:rPr lang="en-US"/>
               <a:t>Fifth level</a:t>
             </a:r>
-            <a:endParaRPr lang="en-US"/>
           </a:p>
         </p:txBody>
       </p:sp>
@@ -1367,7 +1371,7 @@
           <a:p>
             <a:fld id="{5BCAD085-E8A6-8845-BD4E-CB4CCA059FC4}" type="datetimeFigureOut">
               <a:rPr lang="en-US" smtClean="0"/>
-              <a:t>1/27/13</a:t>
+              <a:t>3/18/2026</a:t>
             </a:fld>
             <a:endParaRPr lang="en-US"/>
           </a:p>
@@ -1465,10 +1469,9 @@
           </a:lstStyle>
           <a:p>
             <a:r>
-              <a:rPr lang="en-US" smtClean="0"/>
+              <a:rPr lang="en-US"/>
               <a:t>Click to edit Master title style</a:t>
             </a:r>
-            <a:endParaRPr lang="en-US"/>
           </a:p>
         </p:txBody>
       </p:sp>
@@ -1531,7 +1534,7 @@
           <a:p>
             <a:pPr lvl="0"/>
             <a:r>
-              <a:rPr lang="en-US" smtClean="0"/>
+              <a:rPr lang="en-US"/>
               <a:t>Click to edit Master text styles</a:t>
             </a:r>
           </a:p>
@@ -1587,38 +1590,37 @@
           <a:p>
             <a:pPr lvl="0"/>
             <a:r>
-              <a:rPr lang="en-US" smtClean="0"/>
+              <a:rPr lang="en-US"/>
               <a:t>Click to edit Master text styles</a:t>
             </a:r>
           </a:p>
           <a:p>
             <a:pPr lvl="1"/>
             <a:r>
-              <a:rPr lang="en-US" smtClean="0"/>
+              <a:rPr lang="en-US"/>
               <a:t>Second level</a:t>
             </a:r>
           </a:p>
           <a:p>
             <a:pPr lvl="2"/>
             <a:r>
-              <a:rPr lang="en-US" smtClean="0"/>
+              <a:rPr lang="en-US"/>
               <a:t>Third level</a:t>
             </a:r>
           </a:p>
           <a:p>
             <a:pPr lvl="3"/>
             <a:r>
-              <a:rPr lang="en-US" smtClean="0"/>
+              <a:rPr lang="en-US"/>
               <a:t>Fourth level</a:t>
             </a:r>
           </a:p>
           <a:p>
             <a:pPr lvl="4"/>
             <a:r>
-              <a:rPr lang="en-US" smtClean="0"/>
+              <a:rPr lang="en-US"/>
               <a:t>Fifth level</a:t>
             </a:r>
-            <a:endParaRPr lang="en-US"/>
           </a:p>
         </p:txBody>
       </p:sp>
@@ -1681,7 +1683,7 @@
           <a:p>
             <a:pPr lvl="0"/>
             <a:r>
-              <a:rPr lang="en-US" smtClean="0"/>
+              <a:rPr lang="en-US"/>
               <a:t>Click to edit Master text styles</a:t>
             </a:r>
           </a:p>
@@ -1737,38 +1739,37 @@
           <a:p>
             <a:pPr lvl="0"/>
             <a:r>
-              <a:rPr lang="en-US" smtClean="0"/>
+              <a:rPr lang="en-US"/>
               <a:t>Click to edit Master text styles</a:t>
             </a:r>
           </a:p>
           <a:p>
             <a:pPr lvl="1"/>
             <a:r>
-              <a:rPr lang="en-US" smtClean="0"/>
+              <a:rPr lang="en-US"/>
               <a:t>Second level</a:t>
             </a:r>
           </a:p>
           <a:p>
             <a:pPr lvl="2"/>
             <a:r>
-              <a:rPr lang="en-US" smtClean="0"/>
+              <a:rPr lang="en-US"/>
               <a:t>Third level</a:t>
             </a:r>
           </a:p>
           <a:p>
             <a:pPr lvl="3"/>
             <a:r>
-              <a:rPr lang="en-US" smtClean="0"/>
+              <a:rPr lang="en-US"/>
               <a:t>Fourth level</a:t>
             </a:r>
           </a:p>
           <a:p>
             <a:pPr lvl="4"/>
             <a:r>
-              <a:rPr lang="en-US" smtClean="0"/>
+              <a:rPr lang="en-US"/>
               <a:t>Fifth level</a:t>
             </a:r>
-            <a:endParaRPr lang="en-US"/>
           </a:p>
         </p:txBody>
       </p:sp>
@@ -1789,7 +1790,7 @@
           <a:p>
             <a:fld id="{5BCAD085-E8A6-8845-BD4E-CB4CCA059FC4}" type="datetimeFigureOut">
               <a:rPr lang="en-US" smtClean="0"/>
-              <a:t>1/27/13</a:t>
+              <a:t>3/18/2026</a:t>
             </a:fld>
             <a:endParaRPr lang="en-US"/>
           </a:p>
@@ -1883,10 +1884,9 @@
           <a:lstStyle/>
           <a:p>
             <a:r>
-              <a:rPr lang="en-US" smtClean="0"/>
+              <a:rPr lang="en-US"/>
               <a:t>Click to edit Master title style</a:t>
             </a:r>
-            <a:endParaRPr lang="en-US"/>
           </a:p>
         </p:txBody>
       </p:sp>
@@ -1907,7 +1907,7 @@
           <a:p>
             <a:fld id="{5BCAD085-E8A6-8845-BD4E-CB4CCA059FC4}" type="datetimeFigureOut">
               <a:rPr lang="en-US" smtClean="0"/>
-              <a:t>1/27/13</a:t>
+              <a:t>3/18/2026</a:t>
             </a:fld>
             <a:endParaRPr lang="en-US"/>
           </a:p>
@@ -2002,7 +2002,7 @@
           <a:p>
             <a:fld id="{5BCAD085-E8A6-8845-BD4E-CB4CCA059FC4}" type="datetimeFigureOut">
               <a:rPr lang="en-US" smtClean="0"/>
-              <a:t>1/27/13</a:t>
+              <a:t>3/18/2026</a:t>
             </a:fld>
             <a:endParaRPr lang="en-US"/>
           </a:p>
@@ -2105,10 +2105,9 @@
           </a:lstStyle>
           <a:p>
             <a:r>
-              <a:rPr lang="en-US" smtClean="0"/>
+              <a:rPr lang="en-US"/>
               <a:t>Click to edit Master title style</a:t>
             </a:r>
-            <a:endParaRPr lang="en-US"/>
           </a:p>
         </p:txBody>
       </p:sp>
@@ -2162,38 +2161,37 @@
           <a:p>
             <a:pPr lvl="0"/>
             <a:r>
-              <a:rPr lang="en-US" smtClean="0"/>
+              <a:rPr lang="en-US"/>
               <a:t>Click to edit Master text styles</a:t>
             </a:r>
           </a:p>
           <a:p>
             <a:pPr lvl="1"/>
             <a:r>
-              <a:rPr lang="en-US" smtClean="0"/>
+              <a:rPr lang="en-US"/>
               <a:t>Second level</a:t>
             </a:r>
           </a:p>
           <a:p>
             <a:pPr lvl="2"/>
             <a:r>
-              <a:rPr lang="en-US" smtClean="0"/>
+              <a:rPr lang="en-US"/>
               <a:t>Third level</a:t>
             </a:r>
           </a:p>
           <a:p>
             <a:pPr lvl="3"/>
             <a:r>
-              <a:rPr lang="en-US" smtClean="0"/>
+              <a:rPr lang="en-US"/>
               <a:t>Fourth level</a:t>
             </a:r>
           </a:p>
           <a:p>
             <a:pPr lvl="4"/>
             <a:r>
-              <a:rPr lang="en-US" smtClean="0"/>
+              <a:rPr lang="en-US"/>
               <a:t>Fifth level</a:t>
             </a:r>
-            <a:endParaRPr lang="en-US"/>
           </a:p>
         </p:txBody>
       </p:sp>
@@ -2256,7 +2254,7 @@
           <a:p>
             <a:pPr lvl="0"/>
             <a:r>
-              <a:rPr lang="en-US" smtClean="0"/>
+              <a:rPr lang="en-US"/>
               <a:t>Click to edit Master text styles</a:t>
             </a:r>
           </a:p>
@@ -2279,7 +2277,7 @@
           <a:p>
             <a:fld id="{5BCAD085-E8A6-8845-BD4E-CB4CCA059FC4}" type="datetimeFigureOut">
               <a:rPr lang="en-US" smtClean="0"/>
-              <a:t>1/27/13</a:t>
+              <a:t>3/18/2026</a:t>
             </a:fld>
             <a:endParaRPr lang="en-US"/>
           </a:p>
@@ -2382,10 +2380,9 @@
           </a:lstStyle>
           <a:p>
             <a:r>
-              <a:rPr lang="en-US" smtClean="0"/>
+              <a:rPr lang="en-US"/>
               <a:t>Click to edit Master title style</a:t>
             </a:r>
-            <a:endParaRPr lang="en-US"/>
           </a:p>
         </p:txBody>
       </p:sp>
@@ -2509,7 +2506,7 @@
           <a:p>
             <a:pPr lvl="0"/>
             <a:r>
-              <a:rPr lang="en-US" smtClean="0"/>
+              <a:rPr lang="en-US"/>
               <a:t>Click to edit Master text styles</a:t>
             </a:r>
           </a:p>
@@ -2532,7 +2529,7 @@
           <a:p>
             <a:fld id="{5BCAD085-E8A6-8845-BD4E-CB4CCA059FC4}" type="datetimeFigureOut">
               <a:rPr lang="en-US" smtClean="0"/>
-              <a:t>1/27/13</a:t>
+              <a:t>3/18/2026</a:t>
             </a:fld>
             <a:endParaRPr lang="en-US"/>
           </a:p>
@@ -2641,10 +2638,9 @@
           <a:lstStyle/>
           <a:p>
             <a:r>
-              <a:rPr lang="en-US" smtClean="0"/>
+              <a:rPr lang="en-US"/>
               <a:t>Click to edit Master title style</a:t>
             </a:r>
-            <a:endParaRPr lang="en-US"/>
           </a:p>
         </p:txBody>
       </p:sp>
@@ -2675,38 +2671,37 @@
           <a:p>
             <a:pPr lvl="0"/>
             <a:r>
-              <a:rPr lang="en-US" smtClean="0"/>
+              <a:rPr lang="en-US"/>
               <a:t>Click to edit Master text styles</a:t>
             </a:r>
           </a:p>
           <a:p>
             <a:pPr lvl="1"/>
             <a:r>
-              <a:rPr lang="en-US" smtClean="0"/>
+              <a:rPr lang="en-US"/>
               <a:t>Second level</a:t>
             </a:r>
           </a:p>
           <a:p>
             <a:pPr lvl="2"/>
             <a:r>
-              <a:rPr lang="en-US" smtClean="0"/>
+              <a:rPr lang="en-US"/>
               <a:t>Third level</a:t>
             </a:r>
           </a:p>
           <a:p>
             <a:pPr lvl="3"/>
             <a:r>
-              <a:rPr lang="en-US" smtClean="0"/>
+              <a:rPr lang="en-US"/>
               <a:t>Fourth level</a:t>
             </a:r>
           </a:p>
           <a:p>
             <a:pPr lvl="4"/>
             <a:r>
-              <a:rPr lang="en-US" smtClean="0"/>
+              <a:rPr lang="en-US"/>
               <a:t>Fifth level</a:t>
             </a:r>
-            <a:endParaRPr lang="en-US"/>
           </a:p>
         </p:txBody>
       </p:sp>
@@ -2745,7 +2740,7 @@
           <a:p>
             <a:fld id="{5BCAD085-E8A6-8845-BD4E-CB4CCA059FC4}" type="datetimeFigureOut">
               <a:rPr lang="en-US" smtClean="0"/>
-              <a:t>1/27/13</a:t>
+              <a:t>3/18/2026</a:t>
             </a:fld>
             <a:endParaRPr lang="en-US"/>
           </a:p>
@@ -3104,7 +3099,7 @@
 </file>
 
 <file path=ppt/slides/slide1.xml><?xml version="1.0" encoding="utf-8"?>
-<p:sld xmlns:a="http://schemas.openxmlformats.org/drawingml/2006/main" xmlns:p="http://schemas.openxmlformats.org/presentationml/2006/main" xmlns:r="http://schemas.openxmlformats.org/officeDocument/2006/relationships">
+<p:sld xmlns:a="http://schemas.openxmlformats.org/drawingml/2006/main" xmlns:r="http://schemas.openxmlformats.org/officeDocument/2006/relationships" xmlns:p="http://schemas.openxmlformats.org/presentationml/2006/main">
   <p:cSld>
     <p:bg>
       <p:bgPr>
@@ -3120,7 +3115,14 @@
         <p:cNvGrpSpPr/>
         <p:nvPr/>
       </p:nvGrpSpPr>
-      <p:grpSpPr/>
+      <p:grpSpPr>
+        <a:xfrm>
+          <a:off x="0" y="0"/>
+          <a:ext cx="0" cy="0"/>
+          <a:chOff x="0" y="0"/>
+          <a:chExt cx="0" cy="0"/>
+        </a:xfrm>
+      </p:grpSpPr>
       <p:sp>
         <p:nvSpPr>
           <p:cNvPr id="2" name="Rectangle 1"/>
@@ -3161,6 +3163,7 @@
           <a:lstStyle/>
           <a:p>
             <a:pPr algn="ctr"/>
+            <a:endParaRPr/>
           </a:p>
         </p:txBody>
       </p:sp>
@@ -3204,6 +3207,7 @@
           <a:lstStyle/>
           <a:p>
             <a:pPr algn="ctr"/>
+            <a:endParaRPr/>
           </a:p>
         </p:txBody>
       </p:sp>
@@ -3278,6 +3282,7 @@
               </a:defRPr>
             </a:pPr>
             <a:r>
+              <a:rPr dirty="0"/>
               <a:t>Black–Scholes vs Merton Jump–Diffusion on NIFTY 50 Options</a:t>
             </a:r>
           </a:p>
@@ -3323,6 +3328,7 @@
           <a:lstStyle/>
           <a:p>
             <a:pPr algn="ctr"/>
+            <a:endParaRPr/>
           </a:p>
         </p:txBody>
       </p:sp>
@@ -3443,7 +3449,7 @@
 </file>
 
 <file path=ppt/slides/slide10.xml><?xml version="1.0" encoding="utf-8"?>
-<p:sld xmlns:a="http://schemas.openxmlformats.org/drawingml/2006/main" xmlns:p="http://schemas.openxmlformats.org/presentationml/2006/main" xmlns:r="http://schemas.openxmlformats.org/officeDocument/2006/relationships">
+<p:sld xmlns:a="http://schemas.openxmlformats.org/drawingml/2006/main" xmlns:r="http://schemas.openxmlformats.org/officeDocument/2006/relationships" xmlns:p="http://schemas.openxmlformats.org/presentationml/2006/main">
   <p:cSld>
     <p:bg>
       <p:bgPr>
@@ -3459,7 +3465,14 @@
         <p:cNvGrpSpPr/>
         <p:nvPr/>
       </p:nvGrpSpPr>
-      <p:grpSpPr/>
+      <p:grpSpPr>
+        <a:xfrm>
+          <a:off x="0" y="0"/>
+          <a:ext cx="0" cy="0"/>
+          <a:chOff x="0" y="0"/>
+          <a:chExt cx="0" cy="0"/>
+        </a:xfrm>
+      </p:grpSpPr>
       <p:sp>
         <p:nvSpPr>
           <p:cNvPr id="2" name="Rectangle 1"/>
@@ -3500,6 +3513,7 @@
           <a:lstStyle/>
           <a:p>
             <a:pPr algn="ctr"/>
+            <a:endParaRPr/>
           </a:p>
         </p:txBody>
       </p:sp>
@@ -3579,6 +3593,7 @@
           <a:lstStyle/>
           <a:p>
             <a:pPr algn="ctr"/>
+            <a:endParaRPr/>
           </a:p>
         </p:txBody>
       </p:sp>
@@ -3664,7 +3679,7 @@
 </file>
 
 <file path=ppt/slides/slide11.xml><?xml version="1.0" encoding="utf-8"?>
-<p:sld xmlns:a="http://schemas.openxmlformats.org/drawingml/2006/main" xmlns:p="http://schemas.openxmlformats.org/presentationml/2006/main" xmlns:r="http://schemas.openxmlformats.org/officeDocument/2006/relationships">
+<p:sld xmlns:a="http://schemas.openxmlformats.org/drawingml/2006/main" xmlns:r="http://schemas.openxmlformats.org/officeDocument/2006/relationships" xmlns:p="http://schemas.openxmlformats.org/presentationml/2006/main">
   <p:cSld>
     <p:bg>
       <p:bgPr>
@@ -3680,7 +3695,14 @@
         <p:cNvGrpSpPr/>
         <p:nvPr/>
       </p:nvGrpSpPr>
-      <p:grpSpPr/>
+      <p:grpSpPr>
+        <a:xfrm>
+          <a:off x="0" y="0"/>
+          <a:ext cx="0" cy="0"/>
+          <a:chOff x="0" y="0"/>
+          <a:chExt cx="0" cy="0"/>
+        </a:xfrm>
+      </p:grpSpPr>
       <p:sp>
         <p:nvSpPr>
           <p:cNvPr id="2" name="Rectangle 1"/>
@@ -3721,6 +3743,7 @@
           <a:lstStyle/>
           <a:p>
             <a:pPr algn="ctr"/>
+            <a:endParaRPr/>
           </a:p>
         </p:txBody>
       </p:sp>
@@ -3800,6 +3823,7 @@
           <a:lstStyle/>
           <a:p>
             <a:pPr algn="ctr"/>
+            <a:endParaRPr/>
           </a:p>
         </p:txBody>
       </p:sp>
@@ -3885,7 +3909,7 @@
 </file>
 
 <file path=ppt/slides/slide12.xml><?xml version="1.0" encoding="utf-8"?>
-<p:sld xmlns:a="http://schemas.openxmlformats.org/drawingml/2006/main" xmlns:p="http://schemas.openxmlformats.org/presentationml/2006/main" xmlns:r="http://schemas.openxmlformats.org/officeDocument/2006/relationships">
+<p:sld xmlns:a="http://schemas.openxmlformats.org/drawingml/2006/main" xmlns:r="http://schemas.openxmlformats.org/officeDocument/2006/relationships" xmlns:p="http://schemas.openxmlformats.org/presentationml/2006/main">
   <p:cSld>
     <p:bg>
       <p:bgPr>
@@ -3901,7 +3925,14 @@
         <p:cNvGrpSpPr/>
         <p:nvPr/>
       </p:nvGrpSpPr>
-      <p:grpSpPr/>
+      <p:grpSpPr>
+        <a:xfrm>
+          <a:off x="0" y="0"/>
+          <a:ext cx="0" cy="0"/>
+          <a:chOff x="0" y="0"/>
+          <a:chExt cx="0" cy="0"/>
+        </a:xfrm>
+      </p:grpSpPr>
       <p:sp>
         <p:nvSpPr>
           <p:cNvPr id="2" name="Rectangle 1"/>
@@ -3942,6 +3973,7 @@
           <a:lstStyle/>
           <a:p>
             <a:pPr algn="ctr"/>
+            <a:endParaRPr/>
           </a:p>
         </p:txBody>
       </p:sp>
@@ -4021,6 +4053,7 @@
           <a:lstStyle/>
           <a:p>
             <a:pPr algn="ctr"/>
+            <a:endParaRPr/>
           </a:p>
         </p:txBody>
       </p:sp>
@@ -4106,7 +4139,7 @@
 </file>
 
 <file path=ppt/slides/slide13.xml><?xml version="1.0" encoding="utf-8"?>
-<p:sld xmlns:a="http://schemas.openxmlformats.org/drawingml/2006/main" xmlns:p="http://schemas.openxmlformats.org/presentationml/2006/main" xmlns:r="http://schemas.openxmlformats.org/officeDocument/2006/relationships">
+<p:sld xmlns:a="http://schemas.openxmlformats.org/drawingml/2006/main" xmlns:r="http://schemas.openxmlformats.org/officeDocument/2006/relationships" xmlns:p="http://schemas.openxmlformats.org/presentationml/2006/main">
   <p:cSld>
     <p:bg>
       <p:bgPr>
@@ -4122,7 +4155,14 @@
         <p:cNvGrpSpPr/>
         <p:nvPr/>
       </p:nvGrpSpPr>
-      <p:grpSpPr/>
+      <p:grpSpPr>
+        <a:xfrm>
+          <a:off x="0" y="0"/>
+          <a:ext cx="0" cy="0"/>
+          <a:chOff x="0" y="0"/>
+          <a:chExt cx="0" cy="0"/>
+        </a:xfrm>
+      </p:grpSpPr>
       <p:sp>
         <p:nvSpPr>
           <p:cNvPr id="2" name="Rectangle 1"/>
@@ -4163,6 +4203,7 @@
           <a:lstStyle/>
           <a:p>
             <a:pPr algn="ctr"/>
+            <a:endParaRPr/>
           </a:p>
         </p:txBody>
       </p:sp>
@@ -4242,6 +4283,7 @@
           <a:lstStyle/>
           <a:p>
             <a:pPr algn="ctr"/>
+            <a:endParaRPr/>
           </a:p>
         </p:txBody>
       </p:sp>
@@ -4327,7 +4369,7 @@
 </file>
 
 <file path=ppt/slides/slide14.xml><?xml version="1.0" encoding="utf-8"?>
-<p:sld xmlns:a="http://schemas.openxmlformats.org/drawingml/2006/main" xmlns:p="http://schemas.openxmlformats.org/presentationml/2006/main" xmlns:r="http://schemas.openxmlformats.org/officeDocument/2006/relationships">
+<p:sld xmlns:a="http://schemas.openxmlformats.org/drawingml/2006/main" xmlns:r="http://schemas.openxmlformats.org/officeDocument/2006/relationships" xmlns:p="http://schemas.openxmlformats.org/presentationml/2006/main">
   <p:cSld>
     <p:bg>
       <p:bgPr>
@@ -4343,7 +4385,14 @@
         <p:cNvGrpSpPr/>
         <p:nvPr/>
       </p:nvGrpSpPr>
-      <p:grpSpPr/>
+      <p:grpSpPr>
+        <a:xfrm>
+          <a:off x="0" y="0"/>
+          <a:ext cx="0" cy="0"/>
+          <a:chOff x="0" y="0"/>
+          <a:chExt cx="0" cy="0"/>
+        </a:xfrm>
+      </p:grpSpPr>
       <p:sp>
         <p:nvSpPr>
           <p:cNvPr id="2" name="Rectangle 1"/>
@@ -4384,6 +4433,7 @@
           <a:lstStyle/>
           <a:p>
             <a:pPr algn="ctr"/>
+            <a:endParaRPr/>
           </a:p>
         </p:txBody>
       </p:sp>
@@ -4463,6 +4513,7 @@
           <a:lstStyle/>
           <a:p>
             <a:pPr algn="ctr"/>
+            <a:endParaRPr/>
           </a:p>
         </p:txBody>
       </p:sp>
@@ -4548,7 +4599,7 @@
 </file>
 
 <file path=ppt/slides/slide15.xml><?xml version="1.0" encoding="utf-8"?>
-<p:sld xmlns:a="http://schemas.openxmlformats.org/drawingml/2006/main" xmlns:p="http://schemas.openxmlformats.org/presentationml/2006/main" xmlns:r="http://schemas.openxmlformats.org/officeDocument/2006/relationships">
+<p:sld xmlns:a="http://schemas.openxmlformats.org/drawingml/2006/main" xmlns:r="http://schemas.openxmlformats.org/officeDocument/2006/relationships" xmlns:p="http://schemas.openxmlformats.org/presentationml/2006/main">
   <p:cSld>
     <p:bg>
       <p:bgPr>
@@ -4564,7 +4615,14 @@
         <p:cNvGrpSpPr/>
         <p:nvPr/>
       </p:nvGrpSpPr>
-      <p:grpSpPr/>
+      <p:grpSpPr>
+        <a:xfrm>
+          <a:off x="0" y="0"/>
+          <a:ext cx="0" cy="0"/>
+          <a:chOff x="0" y="0"/>
+          <a:chExt cx="0" cy="0"/>
+        </a:xfrm>
+      </p:grpSpPr>
       <p:sp>
         <p:nvSpPr>
           <p:cNvPr id="2" name="Rectangle 1"/>
@@ -4605,6 +4663,7 @@
           <a:lstStyle/>
           <a:p>
             <a:pPr algn="ctr"/>
+            <a:endParaRPr/>
           </a:p>
         </p:txBody>
       </p:sp>
@@ -4684,6 +4743,7 @@
           <a:lstStyle/>
           <a:p>
             <a:pPr algn="ctr"/>
+            <a:endParaRPr/>
           </a:p>
         </p:txBody>
       </p:sp>
@@ -4756,7 +4816,7 @@
 </file>
 
 <file path=ppt/slides/slide16.xml><?xml version="1.0" encoding="utf-8"?>
-<p:sld xmlns:a="http://schemas.openxmlformats.org/drawingml/2006/main" xmlns:p="http://schemas.openxmlformats.org/presentationml/2006/main" xmlns:r="http://schemas.openxmlformats.org/officeDocument/2006/relationships">
+<p:sld xmlns:a="http://schemas.openxmlformats.org/drawingml/2006/main" xmlns:r="http://schemas.openxmlformats.org/officeDocument/2006/relationships" xmlns:p="http://schemas.openxmlformats.org/presentationml/2006/main">
   <p:cSld>
     <p:bg>
       <p:bgPr>
@@ -4772,7 +4832,14 @@
         <p:cNvGrpSpPr/>
         <p:nvPr/>
       </p:nvGrpSpPr>
-      <p:grpSpPr/>
+      <p:grpSpPr>
+        <a:xfrm>
+          <a:off x="0" y="0"/>
+          <a:ext cx="0" cy="0"/>
+          <a:chOff x="0" y="0"/>
+          <a:chExt cx="0" cy="0"/>
+        </a:xfrm>
+      </p:grpSpPr>
       <p:sp>
         <p:nvSpPr>
           <p:cNvPr id="2" name="Rectangle 1"/>
@@ -4813,6 +4880,7 @@
           <a:lstStyle/>
           <a:p>
             <a:pPr algn="ctr"/>
+            <a:endParaRPr/>
           </a:p>
         </p:txBody>
       </p:sp>
@@ -4892,6 +4960,7 @@
           <a:lstStyle/>
           <a:p>
             <a:pPr algn="ctr"/>
+            <a:endParaRPr/>
           </a:p>
         </p:txBody>
       </p:sp>
@@ -4977,7 +5046,7 @@
 </file>
 
 <file path=ppt/slides/slide17.xml><?xml version="1.0" encoding="utf-8"?>
-<p:sld xmlns:a="http://schemas.openxmlformats.org/drawingml/2006/main" xmlns:p="http://schemas.openxmlformats.org/presentationml/2006/main" xmlns:r="http://schemas.openxmlformats.org/officeDocument/2006/relationships">
+<p:sld xmlns:a="http://schemas.openxmlformats.org/drawingml/2006/main" xmlns:r="http://schemas.openxmlformats.org/officeDocument/2006/relationships" xmlns:p="http://schemas.openxmlformats.org/presentationml/2006/main">
   <p:cSld>
     <p:bg>
       <p:bgPr>
@@ -4993,7 +5062,14 @@
         <p:cNvGrpSpPr/>
         <p:nvPr/>
       </p:nvGrpSpPr>
-      <p:grpSpPr/>
+      <p:grpSpPr>
+        <a:xfrm>
+          <a:off x="0" y="0"/>
+          <a:ext cx="0" cy="0"/>
+          <a:chOff x="0" y="0"/>
+          <a:chExt cx="0" cy="0"/>
+        </a:xfrm>
+      </p:grpSpPr>
       <p:sp>
         <p:nvSpPr>
           <p:cNvPr id="2" name="Rectangle 1"/>
@@ -5034,6 +5110,7 @@
           <a:lstStyle/>
           <a:p>
             <a:pPr algn="ctr"/>
+            <a:endParaRPr/>
           </a:p>
         </p:txBody>
       </p:sp>
@@ -5113,6 +5190,7 @@
           <a:lstStyle/>
           <a:p>
             <a:pPr algn="ctr"/>
+            <a:endParaRPr/>
           </a:p>
         </p:txBody>
       </p:sp>
@@ -5185,7 +5263,7 @@
 </file>
 
 <file path=ppt/slides/slide18.xml><?xml version="1.0" encoding="utf-8"?>
-<p:sld xmlns:a="http://schemas.openxmlformats.org/drawingml/2006/main" xmlns:p="http://schemas.openxmlformats.org/presentationml/2006/main" xmlns:r="http://schemas.openxmlformats.org/officeDocument/2006/relationships">
+<p:sld xmlns:a="http://schemas.openxmlformats.org/drawingml/2006/main" xmlns:r="http://schemas.openxmlformats.org/officeDocument/2006/relationships" xmlns:p="http://schemas.openxmlformats.org/presentationml/2006/main">
   <p:cSld>
     <p:bg>
       <p:bgPr>
@@ -5201,7 +5279,14 @@
         <p:cNvGrpSpPr/>
         <p:nvPr/>
       </p:nvGrpSpPr>
-      <p:grpSpPr/>
+      <p:grpSpPr>
+        <a:xfrm>
+          <a:off x="0" y="0"/>
+          <a:ext cx="0" cy="0"/>
+          <a:chOff x="0" y="0"/>
+          <a:chExt cx="0" cy="0"/>
+        </a:xfrm>
+      </p:grpSpPr>
       <p:sp>
         <p:nvSpPr>
           <p:cNvPr id="2" name="Rectangle 1"/>
@@ -5242,6 +5327,7 @@
           <a:lstStyle/>
           <a:p>
             <a:pPr algn="ctr"/>
+            <a:endParaRPr/>
           </a:p>
         </p:txBody>
       </p:sp>
@@ -5321,6 +5407,7 @@
           <a:lstStyle/>
           <a:p>
             <a:pPr algn="ctr"/>
+            <a:endParaRPr/>
           </a:p>
         </p:txBody>
       </p:sp>
@@ -5419,7 +5506,7 @@
 </file>
 
 <file path=ppt/slides/slide19.xml><?xml version="1.0" encoding="utf-8"?>
-<p:sld xmlns:a="http://schemas.openxmlformats.org/drawingml/2006/main" xmlns:p="http://schemas.openxmlformats.org/presentationml/2006/main" xmlns:r="http://schemas.openxmlformats.org/officeDocument/2006/relationships">
+<p:sld xmlns:a="http://schemas.openxmlformats.org/drawingml/2006/main" xmlns:r="http://schemas.openxmlformats.org/officeDocument/2006/relationships" xmlns:p="http://schemas.openxmlformats.org/presentationml/2006/main">
   <p:cSld>
     <p:bg>
       <p:bgPr>
@@ -5435,7 +5522,14 @@
         <p:cNvGrpSpPr/>
         <p:nvPr/>
       </p:nvGrpSpPr>
-      <p:grpSpPr/>
+      <p:grpSpPr>
+        <a:xfrm>
+          <a:off x="0" y="0"/>
+          <a:ext cx="0" cy="0"/>
+          <a:chOff x="0" y="0"/>
+          <a:chExt cx="0" cy="0"/>
+        </a:xfrm>
+      </p:grpSpPr>
       <p:sp>
         <p:nvSpPr>
           <p:cNvPr id="2" name="Rectangle 1"/>
@@ -5476,6 +5570,7 @@
           <a:lstStyle/>
           <a:p>
             <a:pPr algn="ctr"/>
+            <a:endParaRPr/>
           </a:p>
         </p:txBody>
       </p:sp>
@@ -5555,6 +5650,7 @@
           <a:lstStyle/>
           <a:p>
             <a:pPr algn="ctr"/>
+            <a:endParaRPr/>
           </a:p>
         </p:txBody>
       </p:sp>
@@ -5675,7 +5771,7 @@
 </file>
 
 <file path=ppt/slides/slide2.xml><?xml version="1.0" encoding="utf-8"?>
-<p:sld xmlns:a="http://schemas.openxmlformats.org/drawingml/2006/main" xmlns:p="http://schemas.openxmlformats.org/presentationml/2006/main" xmlns:r="http://schemas.openxmlformats.org/officeDocument/2006/relationships">
+<p:sld xmlns:a="http://schemas.openxmlformats.org/drawingml/2006/main" xmlns:r="http://schemas.openxmlformats.org/officeDocument/2006/relationships" xmlns:p="http://schemas.openxmlformats.org/presentationml/2006/main">
   <p:cSld>
     <p:bg>
       <p:bgPr>
@@ -5691,7 +5787,14 @@
         <p:cNvGrpSpPr/>
         <p:nvPr/>
       </p:nvGrpSpPr>
-      <p:grpSpPr/>
+      <p:grpSpPr>
+        <a:xfrm>
+          <a:off x="0" y="0"/>
+          <a:ext cx="0" cy="0"/>
+          <a:chOff x="0" y="0"/>
+          <a:chExt cx="0" cy="0"/>
+        </a:xfrm>
+      </p:grpSpPr>
       <p:sp>
         <p:nvSpPr>
           <p:cNvPr id="2" name="Rectangle 1"/>
@@ -5732,6 +5835,7 @@
           <a:lstStyle/>
           <a:p>
             <a:pPr algn="ctr"/>
+            <a:endParaRPr/>
           </a:p>
         </p:txBody>
       </p:sp>
@@ -5811,6 +5915,7 @@
           <a:lstStyle/>
           <a:p>
             <a:pPr algn="ctr"/>
+            <a:endParaRPr/>
           </a:p>
         </p:txBody>
       </p:sp>
@@ -6038,7 +6143,7 @@
 </file>
 
 <file path=ppt/slides/slide20.xml><?xml version="1.0" encoding="utf-8"?>
-<p:sld xmlns:a="http://schemas.openxmlformats.org/drawingml/2006/main" xmlns:p="http://schemas.openxmlformats.org/presentationml/2006/main" xmlns:r="http://schemas.openxmlformats.org/officeDocument/2006/relationships">
+<p:sld xmlns:a="http://schemas.openxmlformats.org/drawingml/2006/main" xmlns:r="http://schemas.openxmlformats.org/officeDocument/2006/relationships" xmlns:p="http://schemas.openxmlformats.org/presentationml/2006/main">
   <p:cSld>
     <p:bg>
       <p:bgPr>
@@ -6054,7 +6159,14 @@
         <p:cNvGrpSpPr/>
         <p:nvPr/>
       </p:nvGrpSpPr>
-      <p:grpSpPr/>
+      <p:grpSpPr>
+        <a:xfrm>
+          <a:off x="0" y="0"/>
+          <a:ext cx="0" cy="0"/>
+          <a:chOff x="0" y="0"/>
+          <a:chExt cx="0" cy="0"/>
+        </a:xfrm>
+      </p:grpSpPr>
       <p:sp>
         <p:nvSpPr>
           <p:cNvPr id="2" name="Rectangle 1"/>
@@ -6095,6 +6207,7 @@
           <a:lstStyle/>
           <a:p>
             <a:pPr algn="ctr"/>
+            <a:endParaRPr/>
           </a:p>
         </p:txBody>
       </p:sp>
@@ -6174,6 +6287,7 @@
           <a:lstStyle/>
           <a:p>
             <a:pPr algn="ctr"/>
+            <a:endParaRPr/>
           </a:p>
         </p:txBody>
       </p:sp>
@@ -6259,7 +6373,7 @@
 </file>
 
 <file path=ppt/slides/slide21.xml><?xml version="1.0" encoding="utf-8"?>
-<p:sld xmlns:a="http://schemas.openxmlformats.org/drawingml/2006/main" xmlns:p="http://schemas.openxmlformats.org/presentationml/2006/main" xmlns:r="http://schemas.openxmlformats.org/officeDocument/2006/relationships">
+<p:sld xmlns:a="http://schemas.openxmlformats.org/drawingml/2006/main" xmlns:r="http://schemas.openxmlformats.org/officeDocument/2006/relationships" xmlns:p="http://schemas.openxmlformats.org/presentationml/2006/main">
   <p:cSld>
     <p:bg>
       <p:bgPr>
@@ -6275,7 +6389,14 @@
         <p:cNvGrpSpPr/>
         <p:nvPr/>
       </p:nvGrpSpPr>
-      <p:grpSpPr/>
+      <p:grpSpPr>
+        <a:xfrm>
+          <a:off x="0" y="0"/>
+          <a:ext cx="0" cy="0"/>
+          <a:chOff x="0" y="0"/>
+          <a:chExt cx="0" cy="0"/>
+        </a:xfrm>
+      </p:grpSpPr>
       <p:sp>
         <p:nvSpPr>
           <p:cNvPr id="2" name="Rectangle 1"/>
@@ -6316,6 +6437,7 @@
           <a:lstStyle/>
           <a:p>
             <a:pPr algn="ctr"/>
+            <a:endParaRPr/>
           </a:p>
         </p:txBody>
       </p:sp>
@@ -6395,6 +6517,7 @@
           <a:lstStyle/>
           <a:p>
             <a:pPr algn="ctr"/>
+            <a:endParaRPr/>
           </a:p>
         </p:txBody>
       </p:sp>
@@ -6467,7 +6590,7 @@
 </file>
 
 <file path=ppt/slides/slide22.xml><?xml version="1.0" encoding="utf-8"?>
-<p:sld xmlns:a="http://schemas.openxmlformats.org/drawingml/2006/main" xmlns:p="http://schemas.openxmlformats.org/presentationml/2006/main" xmlns:r="http://schemas.openxmlformats.org/officeDocument/2006/relationships">
+<p:sld xmlns:a="http://schemas.openxmlformats.org/drawingml/2006/main" xmlns:r="http://schemas.openxmlformats.org/officeDocument/2006/relationships" xmlns:p="http://schemas.openxmlformats.org/presentationml/2006/main">
   <p:cSld>
     <p:bg>
       <p:bgPr>
@@ -6483,7 +6606,14 @@
         <p:cNvGrpSpPr/>
         <p:nvPr/>
       </p:nvGrpSpPr>
-      <p:grpSpPr/>
+      <p:grpSpPr>
+        <a:xfrm>
+          <a:off x="0" y="0"/>
+          <a:ext cx="0" cy="0"/>
+          <a:chOff x="0" y="0"/>
+          <a:chExt cx="0" cy="0"/>
+        </a:xfrm>
+      </p:grpSpPr>
       <p:sp>
         <p:nvSpPr>
           <p:cNvPr id="2" name="Rectangle 1"/>
@@ -6524,6 +6654,7 @@
           <a:lstStyle/>
           <a:p>
             <a:pPr algn="ctr"/>
+            <a:endParaRPr/>
           </a:p>
         </p:txBody>
       </p:sp>
@@ -6603,6 +6734,7 @@
           <a:lstStyle/>
           <a:p>
             <a:pPr algn="ctr"/>
+            <a:endParaRPr/>
           </a:p>
         </p:txBody>
       </p:sp>
@@ -6639,7 +6771,7 @@
 </file>
 
 <file path=ppt/slides/slide23.xml><?xml version="1.0" encoding="utf-8"?>
-<p:sld xmlns:a="http://schemas.openxmlformats.org/drawingml/2006/main" xmlns:p="http://schemas.openxmlformats.org/presentationml/2006/main" xmlns:r="http://schemas.openxmlformats.org/officeDocument/2006/relationships">
+<p:sld xmlns:a="http://schemas.openxmlformats.org/drawingml/2006/main" xmlns:r="http://schemas.openxmlformats.org/officeDocument/2006/relationships" xmlns:p="http://schemas.openxmlformats.org/presentationml/2006/main">
   <p:cSld>
     <p:bg>
       <p:bgPr>
@@ -6655,7 +6787,14 @@
         <p:cNvGrpSpPr/>
         <p:nvPr/>
       </p:nvGrpSpPr>
-      <p:grpSpPr/>
+      <p:grpSpPr>
+        <a:xfrm>
+          <a:off x="0" y="0"/>
+          <a:ext cx="0" cy="0"/>
+          <a:chOff x="0" y="0"/>
+          <a:chExt cx="0" cy="0"/>
+        </a:xfrm>
+      </p:grpSpPr>
       <p:sp>
         <p:nvSpPr>
           <p:cNvPr id="2" name="Rectangle 1"/>
@@ -6696,6 +6835,7 @@
           <a:lstStyle/>
           <a:p>
             <a:pPr algn="ctr"/>
+            <a:endParaRPr/>
           </a:p>
         </p:txBody>
       </p:sp>
@@ -6775,6 +6915,7 @@
           <a:lstStyle/>
           <a:p>
             <a:pPr algn="ctr"/>
+            <a:endParaRPr/>
           </a:p>
         </p:txBody>
       </p:sp>
@@ -6797,9 +6938,27 @@
                 <a:tableStyleId>{5C22544A-7EE6-4342-B048-85BDC9FD1C3A}</a:tableStyleId>
               </a:tblPr>
               <a:tblGrid>
-                <a:gridCol w="3749040"/>
-                <a:gridCol w="3749040"/>
-                <a:gridCol w="3749040"/>
+                <a:gridCol w="3749040">
+                  <a:extLst>
+                    <a:ext uri="{9D8B030D-6E8A-4147-A177-3AD203B41FA5}">
+                      <a16:colId xmlns:a16="http://schemas.microsoft.com/office/drawing/2014/main" val="20000"/>
+                    </a:ext>
+                  </a:extLst>
+                </a:gridCol>
+                <a:gridCol w="3749040">
+                  <a:extLst>
+                    <a:ext uri="{9D8B030D-6E8A-4147-A177-3AD203B41FA5}">
+                      <a16:colId xmlns:a16="http://schemas.microsoft.com/office/drawing/2014/main" val="20001"/>
+                    </a:ext>
+                  </a:extLst>
+                </a:gridCol>
+                <a:gridCol w="3749040">
+                  <a:extLst>
+                    <a:ext uri="{9D8B030D-6E8A-4147-A177-3AD203B41FA5}">
+                      <a16:colId xmlns:a16="http://schemas.microsoft.com/office/drawing/2014/main" val="20002"/>
+                    </a:ext>
+                  </a:extLst>
+                </a:gridCol>
               </a:tblGrid>
               <a:tr h="457200">
                 <a:tc>
@@ -6874,6 +7033,11 @@
                     </a:solidFill>
                   </a:tcPr>
                 </a:tc>
+                <a:extLst>
+                  <a:ext uri="{0D108BD9-81ED-4DB2-BD59-A6C34878D82A}">
+                    <a16:rowId xmlns:a16="http://schemas.microsoft.com/office/drawing/2014/main" val="10000"/>
+                  </a:ext>
+                </a:extLst>
               </a:tr>
               <a:tr h="457200">
                 <a:tc>
@@ -6936,6 +7100,11 @@
                   </a:txBody>
                   <a:tcPr/>
                 </a:tc>
+                <a:extLst>
+                  <a:ext uri="{0D108BD9-81ED-4DB2-BD59-A6C34878D82A}">
+                    <a16:rowId xmlns:a16="http://schemas.microsoft.com/office/drawing/2014/main" val="10001"/>
+                  </a:ext>
+                </a:extLst>
               </a:tr>
               <a:tr h="457200">
                 <a:tc>
@@ -7010,6 +7179,11 @@
                     </a:solidFill>
                   </a:tcPr>
                 </a:tc>
+                <a:extLst>
+                  <a:ext uri="{0D108BD9-81ED-4DB2-BD59-A6C34878D82A}">
+                    <a16:rowId xmlns:a16="http://schemas.microsoft.com/office/drawing/2014/main" val="10002"/>
+                  </a:ext>
+                </a:extLst>
               </a:tr>
               <a:tr h="457200">
                 <a:tc>
@@ -7072,6 +7246,11 @@
                   </a:txBody>
                   <a:tcPr/>
                 </a:tc>
+                <a:extLst>
+                  <a:ext uri="{0D108BD9-81ED-4DB2-BD59-A6C34878D82A}">
+                    <a16:rowId xmlns:a16="http://schemas.microsoft.com/office/drawing/2014/main" val="10003"/>
+                  </a:ext>
+                </a:extLst>
               </a:tr>
               <a:tr h="457200">
                 <a:tc>
@@ -7146,6 +7325,11 @@
                     </a:solidFill>
                   </a:tcPr>
                 </a:tc>
+                <a:extLst>
+                  <a:ext uri="{0D108BD9-81ED-4DB2-BD59-A6C34878D82A}">
+                    <a16:rowId xmlns:a16="http://schemas.microsoft.com/office/drawing/2014/main" val="10004"/>
+                  </a:ext>
+                </a:extLst>
               </a:tr>
               <a:tr h="457200">
                 <a:tc>
@@ -7208,6 +7392,11 @@
                   </a:txBody>
                   <a:tcPr/>
                 </a:tc>
+                <a:extLst>
+                  <a:ext uri="{0D108BD9-81ED-4DB2-BD59-A6C34878D82A}">
+                    <a16:rowId xmlns:a16="http://schemas.microsoft.com/office/drawing/2014/main" val="10005"/>
+                  </a:ext>
+                </a:extLst>
               </a:tr>
               <a:tr h="457200">
                 <a:tc>
@@ -7282,6 +7471,11 @@
                     </a:solidFill>
                   </a:tcPr>
                 </a:tc>
+                <a:extLst>
+                  <a:ext uri="{0D108BD9-81ED-4DB2-BD59-A6C34878D82A}">
+                    <a16:rowId xmlns:a16="http://schemas.microsoft.com/office/drawing/2014/main" val="10006"/>
+                  </a:ext>
+                </a:extLst>
               </a:tr>
               <a:tr h="457200">
                 <a:tc>
@@ -7344,6 +7538,11 @@
                   </a:txBody>
                   <a:tcPr/>
                 </a:tc>
+                <a:extLst>
+                  <a:ext uri="{0D108BD9-81ED-4DB2-BD59-A6C34878D82A}">
+                    <a16:rowId xmlns:a16="http://schemas.microsoft.com/office/drawing/2014/main" val="10007"/>
+                  </a:ext>
+                </a:extLst>
               </a:tr>
               <a:tr h="457200">
                 <a:tc>
@@ -7418,6 +7617,11 @@
                     </a:solidFill>
                   </a:tcPr>
                 </a:tc>
+                <a:extLst>
+                  <a:ext uri="{0D108BD9-81ED-4DB2-BD59-A6C34878D82A}">
+                    <a16:rowId xmlns:a16="http://schemas.microsoft.com/office/drawing/2014/main" val="10008"/>
+                  </a:ext>
+                </a:extLst>
               </a:tr>
             </a:tbl>
           </a:graphicData>
@@ -7432,7 +7636,7 @@
 </file>
 
 <file path=ppt/slides/slide24.xml><?xml version="1.0" encoding="utf-8"?>
-<p:sld xmlns:a="http://schemas.openxmlformats.org/drawingml/2006/main" xmlns:p="http://schemas.openxmlformats.org/presentationml/2006/main" xmlns:r="http://schemas.openxmlformats.org/officeDocument/2006/relationships">
+<p:sld xmlns:a="http://schemas.openxmlformats.org/drawingml/2006/main" xmlns:r="http://schemas.openxmlformats.org/officeDocument/2006/relationships" xmlns:p="http://schemas.openxmlformats.org/presentationml/2006/main">
   <p:cSld>
     <p:bg>
       <p:bgPr>
@@ -7448,7 +7652,14 @@
         <p:cNvGrpSpPr/>
         <p:nvPr/>
       </p:nvGrpSpPr>
-      <p:grpSpPr/>
+      <p:grpSpPr>
+        <a:xfrm>
+          <a:off x="0" y="0"/>
+          <a:ext cx="0" cy="0"/>
+          <a:chOff x="0" y="0"/>
+          <a:chExt cx="0" cy="0"/>
+        </a:xfrm>
+      </p:grpSpPr>
       <p:sp>
         <p:nvSpPr>
           <p:cNvPr id="2" name="Rectangle 1"/>
@@ -7489,6 +7700,7 @@
           <a:lstStyle/>
           <a:p>
             <a:pPr algn="ctr"/>
+            <a:endParaRPr/>
           </a:p>
         </p:txBody>
       </p:sp>
@@ -7568,6 +7780,7 @@
           <a:lstStyle/>
           <a:p>
             <a:pPr algn="ctr"/>
+            <a:endParaRPr/>
           </a:p>
         </p:txBody>
       </p:sp>
@@ -7614,6 +7827,7 @@
                 <a:latin typeface="Calibri"/>
               </a:defRPr>
             </a:pPr>
+            <a:endParaRPr/>
           </a:p>
           <a:p>
             <a:pPr>
@@ -7663,6 +7877,7 @@
                 <a:latin typeface="Calibri"/>
               </a:defRPr>
             </a:pPr>
+            <a:endParaRPr/>
           </a:p>
           <a:p>
             <a:pPr>
@@ -7699,6 +7914,7 @@
                 <a:latin typeface="Calibri"/>
               </a:defRPr>
             </a:pPr>
+            <a:endParaRPr/>
           </a:p>
           <a:p>
             <a:pPr>
@@ -7776,7 +7992,7 @@
 </file>
 
 <file path=ppt/slides/slide25.xml><?xml version="1.0" encoding="utf-8"?>
-<p:sld xmlns:a="http://schemas.openxmlformats.org/drawingml/2006/main" xmlns:p="http://schemas.openxmlformats.org/presentationml/2006/main" xmlns:r="http://schemas.openxmlformats.org/officeDocument/2006/relationships">
+<p:sld xmlns:a="http://schemas.openxmlformats.org/drawingml/2006/main" xmlns:r="http://schemas.openxmlformats.org/officeDocument/2006/relationships" xmlns:p="http://schemas.openxmlformats.org/presentationml/2006/main">
   <p:cSld>
     <p:bg>
       <p:bgPr>
@@ -7792,7 +8008,14 @@
         <p:cNvGrpSpPr/>
         <p:nvPr/>
       </p:nvGrpSpPr>
-      <p:grpSpPr/>
+      <p:grpSpPr>
+        <a:xfrm>
+          <a:off x="0" y="0"/>
+          <a:ext cx="0" cy="0"/>
+          <a:chOff x="0" y="0"/>
+          <a:chExt cx="0" cy="0"/>
+        </a:xfrm>
+      </p:grpSpPr>
       <p:sp>
         <p:nvSpPr>
           <p:cNvPr id="2" name="Rectangle 1"/>
@@ -7833,6 +8056,7 @@
           <a:lstStyle/>
           <a:p>
             <a:pPr algn="ctr"/>
+            <a:endParaRPr/>
           </a:p>
         </p:txBody>
       </p:sp>
@@ -7912,6 +8136,7 @@
           <a:lstStyle/>
           <a:p>
             <a:pPr algn="ctr"/>
+            <a:endParaRPr/>
           </a:p>
         </p:txBody>
       </p:sp>
@@ -8010,6 +8235,7 @@
                 <a:latin typeface="Calibri"/>
               </a:defRPr>
             </a:pPr>
+            <a:endParaRPr/>
           </a:p>
           <a:p>
             <a:pPr>
@@ -8085,6 +8311,7 @@
                 <a:latin typeface="Calibri"/>
               </a:defRPr>
             </a:pPr>
+            <a:endParaRPr/>
           </a:p>
           <a:p>
             <a:pPr>
@@ -8162,7 +8389,7 @@
 </file>
 
 <file path=ppt/slides/slide26.xml><?xml version="1.0" encoding="utf-8"?>
-<p:sld xmlns:a="http://schemas.openxmlformats.org/drawingml/2006/main" xmlns:p="http://schemas.openxmlformats.org/presentationml/2006/main" xmlns:r="http://schemas.openxmlformats.org/officeDocument/2006/relationships">
+<p:sld xmlns:a="http://schemas.openxmlformats.org/drawingml/2006/main" xmlns:r="http://schemas.openxmlformats.org/officeDocument/2006/relationships" xmlns:p="http://schemas.openxmlformats.org/presentationml/2006/main">
   <p:cSld>
     <p:bg>
       <p:bgPr>
@@ -8178,7 +8405,14 @@
         <p:cNvGrpSpPr/>
         <p:nvPr/>
       </p:nvGrpSpPr>
-      <p:grpSpPr/>
+      <p:grpSpPr>
+        <a:xfrm>
+          <a:off x="0" y="0"/>
+          <a:ext cx="0" cy="0"/>
+          <a:chOff x="0" y="0"/>
+          <a:chExt cx="0" cy="0"/>
+        </a:xfrm>
+      </p:grpSpPr>
       <p:sp>
         <p:nvSpPr>
           <p:cNvPr id="2" name="Rectangle 1"/>
@@ -8219,6 +8453,7 @@
           <a:lstStyle/>
           <a:p>
             <a:pPr algn="ctr"/>
+            <a:endParaRPr/>
           </a:p>
         </p:txBody>
       </p:sp>
@@ -8262,6 +8497,7 @@
           <a:lstStyle/>
           <a:p>
             <a:pPr algn="ctr"/>
+            <a:endParaRPr/>
           </a:p>
         </p:txBody>
       </p:sp>
@@ -8341,6 +8577,7 @@
           <a:lstStyle/>
           <a:p>
             <a:pPr algn="ctr"/>
+            <a:endParaRPr/>
           </a:p>
         </p:txBody>
       </p:sp>
@@ -8465,7 +8702,7 @@
 </file>
 
 <file path=ppt/slides/slide3.xml><?xml version="1.0" encoding="utf-8"?>
-<p:sld xmlns:a="http://schemas.openxmlformats.org/drawingml/2006/main" xmlns:p="http://schemas.openxmlformats.org/presentationml/2006/main" xmlns:r="http://schemas.openxmlformats.org/officeDocument/2006/relationships">
+<p:sld xmlns:a="http://schemas.openxmlformats.org/drawingml/2006/main" xmlns:r="http://schemas.openxmlformats.org/officeDocument/2006/relationships" xmlns:p="http://schemas.openxmlformats.org/presentationml/2006/main">
   <p:cSld>
     <p:bg>
       <p:bgPr>
@@ -8481,7 +8718,14 @@
         <p:cNvGrpSpPr/>
         <p:nvPr/>
       </p:nvGrpSpPr>
-      <p:grpSpPr/>
+      <p:grpSpPr>
+        <a:xfrm>
+          <a:off x="0" y="0"/>
+          <a:ext cx="0" cy="0"/>
+          <a:chOff x="0" y="0"/>
+          <a:chExt cx="0" cy="0"/>
+        </a:xfrm>
+      </p:grpSpPr>
       <p:sp>
         <p:nvSpPr>
           <p:cNvPr id="2" name="Rectangle 1"/>
@@ -8522,6 +8766,7 @@
           <a:lstStyle/>
           <a:p>
             <a:pPr algn="ctr"/>
+            <a:endParaRPr/>
           </a:p>
         </p:txBody>
       </p:sp>
@@ -8601,6 +8846,7 @@
           <a:lstStyle/>
           <a:p>
             <a:pPr algn="ctr"/>
+            <a:endParaRPr/>
           </a:p>
         </p:txBody>
       </p:sp>
@@ -8635,6 +8881,7 @@
               </a:defRPr>
             </a:pPr>
             <a:r>
+              <a:rPr dirty="0"/>
               <a:t>• NIFTY 50 index options are among the most actively traded contracts globally</a:t>
             </a:r>
           </a:p>
@@ -8648,6 +8895,7 @@
               </a:defRPr>
             </a:pPr>
             <a:r>
+              <a:rPr dirty="0"/>
               <a:t>• Practitioners use Black-Scholes to price &amp; hedge — but it systematically misprices:</a:t>
             </a:r>
           </a:p>
@@ -8661,6 +8909,7 @@
               </a:defRPr>
             </a:pPr>
             <a:r>
+              <a:rPr dirty="0"/>
               <a:t>   – Deep out-of-the-money (OTM) PUTS are underpriced → inadequate crash protection</a:t>
             </a:r>
           </a:p>
@@ -8674,6 +8923,7 @@
               </a:defRPr>
             </a:pPr>
             <a:r>
+              <a:rPr dirty="0"/>
               <a:t>   – The "volatility smile" in market data contradicts BS flat-IV assumption</a:t>
             </a:r>
           </a:p>
@@ -8686,6 +8936,7 @@
                 <a:latin typeface="Calibri"/>
               </a:defRPr>
             </a:pPr>
+            <a:endParaRPr dirty="0"/>
           </a:p>
           <a:p>
             <a:pPr>
@@ -8697,6 +8948,7 @@
               </a:defRPr>
             </a:pPr>
             <a:r>
+              <a:rPr dirty="0"/>
               <a:t>• Root cause: BS assumes Gaussian log-returns (thin tails + constant volatility)</a:t>
             </a:r>
           </a:p>
@@ -8710,6 +8962,7 @@
               </a:defRPr>
             </a:pPr>
             <a:r>
+              <a:rPr dirty="0"/>
               <a:t>  → assigns near-zero probability to large moves like COVID −13% day, election −8% gap</a:t>
             </a:r>
           </a:p>
@@ -8722,6 +8975,7 @@
                 <a:latin typeface="Calibri"/>
               </a:defRPr>
             </a:pPr>
+            <a:endParaRPr dirty="0"/>
           </a:p>
           <a:p>
             <a:pPr>
@@ -8733,6 +8987,7 @@
               </a:defRPr>
             </a:pPr>
             <a:r>
+              <a:rPr dirty="0"/>
               <a:t>• This project: compare BS vs Merton Jump-Diffusion option prices on NIFTY 50</a:t>
             </a:r>
           </a:p>
@@ -8746,6 +9001,7 @@
               </a:defRPr>
             </a:pPr>
             <a:r>
+              <a:rPr dirty="0"/>
               <a:t>  → calibrate both models to historical data, then price European calls &amp; puts</a:t>
             </a:r>
           </a:p>
@@ -8759,6 +9015,7 @@
               </a:defRPr>
             </a:pPr>
             <a:r>
+              <a:rPr dirty="0"/>
               <a:t>  → quantify how much BS underprices crash protection</a:t>
             </a:r>
           </a:p>
@@ -8771,6 +9028,7 @@
                 <a:latin typeface="Calibri"/>
               </a:defRPr>
             </a:pPr>
+            <a:endParaRPr dirty="0"/>
           </a:p>
           <a:p>
             <a:pPr>
@@ -8782,6 +9040,7 @@
               </a:defRPr>
             </a:pPr>
             <a:r>
+              <a:rPr dirty="0"/>
               <a:t>• References: Black &amp; Scholes (1973), Merton (1976)</a:t>
             </a:r>
           </a:p>
@@ -8796,7 +9055,7 @@
 </file>
 
 <file path=ppt/slides/slide4.xml><?xml version="1.0" encoding="utf-8"?>
-<p:sld xmlns:a="http://schemas.openxmlformats.org/drawingml/2006/main" xmlns:p="http://schemas.openxmlformats.org/presentationml/2006/main" xmlns:r="http://schemas.openxmlformats.org/officeDocument/2006/relationships">
+<p:sld xmlns:a="http://schemas.openxmlformats.org/drawingml/2006/main" xmlns:r="http://schemas.openxmlformats.org/officeDocument/2006/relationships" xmlns:p="http://schemas.openxmlformats.org/presentationml/2006/main">
   <p:cSld>
     <p:bg>
       <p:bgPr>
@@ -8812,7 +9071,14 @@
         <p:cNvGrpSpPr/>
         <p:nvPr/>
       </p:nvGrpSpPr>
-      <p:grpSpPr/>
+      <p:grpSpPr>
+        <a:xfrm>
+          <a:off x="0" y="0"/>
+          <a:ext cx="0" cy="0"/>
+          <a:chOff x="0" y="0"/>
+          <a:chExt cx="0" cy="0"/>
+        </a:xfrm>
+      </p:grpSpPr>
       <p:sp>
         <p:nvSpPr>
           <p:cNvPr id="2" name="Rectangle 1"/>
@@ -8853,6 +9119,7 @@
           <a:lstStyle/>
           <a:p>
             <a:pPr algn="ctr"/>
+            <a:endParaRPr/>
           </a:p>
         </p:txBody>
       </p:sp>
@@ -8932,6 +9199,7 @@
           <a:lstStyle/>
           <a:p>
             <a:pPr algn="ctr"/>
+            <a:endParaRPr/>
           </a:p>
         </p:txBody>
       </p:sp>
@@ -8951,8 +9219,8 @@
         </p:blipFill>
         <p:spPr>
           <a:xfrm>
-            <a:off x="274320" y="1097280"/>
-            <a:ext cx="11247120" cy="6986847"/>
+            <a:off x="1280160" y="950976"/>
+            <a:ext cx="8595360" cy="5339542"/>
           </a:xfrm>
           <a:prstGeom prst="rect">
             <a:avLst/>
@@ -8967,8 +9235,8 @@
         </p:nvSpPr>
         <p:spPr>
           <a:xfrm>
-            <a:off x="731520" y="5760720"/>
-            <a:ext cx="10058400" cy="1097280"/>
+            <a:off x="1005840" y="6253163"/>
+            <a:ext cx="10403326" cy="492443"/>
           </a:xfrm>
           <a:prstGeom prst="rect">
             <a:avLst/>
@@ -9017,7 +9285,7 @@
 </file>
 
 <file path=ppt/slides/slide5.xml><?xml version="1.0" encoding="utf-8"?>
-<p:sld xmlns:a="http://schemas.openxmlformats.org/drawingml/2006/main" xmlns:p="http://schemas.openxmlformats.org/presentationml/2006/main" xmlns:r="http://schemas.openxmlformats.org/officeDocument/2006/relationships">
+<p:sld xmlns:a="http://schemas.openxmlformats.org/drawingml/2006/main" xmlns:r="http://schemas.openxmlformats.org/officeDocument/2006/relationships" xmlns:p="http://schemas.openxmlformats.org/presentationml/2006/main">
   <p:cSld>
     <p:bg>
       <p:bgPr>
@@ -9033,7 +9301,14 @@
         <p:cNvGrpSpPr/>
         <p:nvPr/>
       </p:nvGrpSpPr>
-      <p:grpSpPr/>
+      <p:grpSpPr>
+        <a:xfrm>
+          <a:off x="0" y="0"/>
+          <a:ext cx="0" cy="0"/>
+          <a:chOff x="0" y="0"/>
+          <a:chExt cx="0" cy="0"/>
+        </a:xfrm>
+      </p:grpSpPr>
       <p:sp>
         <p:nvSpPr>
           <p:cNvPr id="2" name="Rectangle 1"/>
@@ -9074,6 +9349,7 @@
           <a:lstStyle/>
           <a:p>
             <a:pPr algn="ctr"/>
+            <a:endParaRPr/>
           </a:p>
         </p:txBody>
       </p:sp>
@@ -9153,6 +9429,7 @@
           <a:lstStyle/>
           <a:p>
             <a:pPr algn="ctr"/>
+            <a:endParaRPr/>
           </a:p>
         </p:txBody>
       </p:sp>
@@ -9336,7 +9613,7 @@
 </file>
 
 <file path=ppt/slides/slide6.xml><?xml version="1.0" encoding="utf-8"?>
-<p:sld xmlns:a="http://schemas.openxmlformats.org/drawingml/2006/main" xmlns:p="http://schemas.openxmlformats.org/presentationml/2006/main" xmlns:r="http://schemas.openxmlformats.org/officeDocument/2006/relationships">
+<p:sld xmlns:a="http://schemas.openxmlformats.org/drawingml/2006/main" xmlns:r="http://schemas.openxmlformats.org/officeDocument/2006/relationships" xmlns:p="http://schemas.openxmlformats.org/presentationml/2006/main">
   <p:cSld>
     <p:bg>
       <p:bgPr>
@@ -9352,7 +9629,14 @@
         <p:cNvGrpSpPr/>
         <p:nvPr/>
       </p:nvGrpSpPr>
-      <p:grpSpPr/>
+      <p:grpSpPr>
+        <a:xfrm>
+          <a:off x="0" y="0"/>
+          <a:ext cx="0" cy="0"/>
+          <a:chOff x="0" y="0"/>
+          <a:chExt cx="0" cy="0"/>
+        </a:xfrm>
+      </p:grpSpPr>
       <p:sp>
         <p:nvSpPr>
           <p:cNvPr id="2" name="Rectangle 1"/>
@@ -9393,6 +9677,7 @@
           <a:lstStyle/>
           <a:p>
             <a:pPr algn="ctr"/>
+            <a:endParaRPr/>
           </a:p>
         </p:txBody>
       </p:sp>
@@ -9472,6 +9757,7 @@
           <a:lstStyle/>
           <a:p>
             <a:pPr algn="ctr"/>
+            <a:endParaRPr/>
           </a:p>
         </p:txBody>
       </p:sp>
@@ -9491,7 +9777,7 @@
         </p:blipFill>
         <p:spPr>
           <a:xfrm>
-            <a:off x="640080" y="1280160"/>
+            <a:off x="579120" y="1280160"/>
             <a:ext cx="6126480" cy="1112440"/>
           </a:xfrm>
           <a:prstGeom prst="rect">
@@ -9654,7 +9940,7 @@
 </file>
 
 <file path=ppt/slides/slide7.xml><?xml version="1.0" encoding="utf-8"?>
-<p:sld xmlns:a="http://schemas.openxmlformats.org/drawingml/2006/main" xmlns:p="http://schemas.openxmlformats.org/presentationml/2006/main" xmlns:r="http://schemas.openxmlformats.org/officeDocument/2006/relationships">
+<p:sld xmlns:a="http://schemas.openxmlformats.org/drawingml/2006/main" xmlns:r="http://schemas.openxmlformats.org/officeDocument/2006/relationships" xmlns:p="http://schemas.openxmlformats.org/presentationml/2006/main">
   <p:cSld>
     <p:bg>
       <p:bgPr>
@@ -9670,7 +9956,14 @@
         <p:cNvGrpSpPr/>
         <p:nvPr/>
       </p:nvGrpSpPr>
-      <p:grpSpPr/>
+      <p:grpSpPr>
+        <a:xfrm>
+          <a:off x="0" y="0"/>
+          <a:ext cx="0" cy="0"/>
+          <a:chOff x="0" y="0"/>
+          <a:chExt cx="0" cy="0"/>
+        </a:xfrm>
+      </p:grpSpPr>
       <p:sp>
         <p:nvSpPr>
           <p:cNvPr id="2" name="Rectangle 1"/>
@@ -9711,6 +10004,7 @@
           <a:lstStyle/>
           <a:p>
             <a:pPr algn="ctr"/>
+            <a:endParaRPr/>
           </a:p>
         </p:txBody>
       </p:sp>
@@ -9790,6 +10084,7 @@
           <a:lstStyle/>
           <a:p>
             <a:pPr algn="ctr"/>
+            <a:endParaRPr/>
           </a:p>
         </p:txBody>
       </p:sp>
@@ -9998,7 +10293,7 @@
 </file>
 
 <file path=ppt/slides/slide8.xml><?xml version="1.0" encoding="utf-8"?>
-<p:sld xmlns:a="http://schemas.openxmlformats.org/drawingml/2006/main" xmlns:p="http://schemas.openxmlformats.org/presentationml/2006/main" xmlns:r="http://schemas.openxmlformats.org/officeDocument/2006/relationships">
+<p:sld xmlns:a="http://schemas.openxmlformats.org/drawingml/2006/main" xmlns:r="http://schemas.openxmlformats.org/officeDocument/2006/relationships" xmlns:p="http://schemas.openxmlformats.org/presentationml/2006/main">
   <p:cSld>
     <p:bg>
       <p:bgPr>
@@ -10014,7 +10309,14 @@
         <p:cNvGrpSpPr/>
         <p:nvPr/>
       </p:nvGrpSpPr>
-      <p:grpSpPr/>
+      <p:grpSpPr>
+        <a:xfrm>
+          <a:off x="0" y="0"/>
+          <a:ext cx="0" cy="0"/>
+          <a:chOff x="0" y="0"/>
+          <a:chExt cx="0" cy="0"/>
+        </a:xfrm>
+      </p:grpSpPr>
       <p:sp>
         <p:nvSpPr>
           <p:cNvPr id="2" name="Rectangle 1"/>
@@ -10055,6 +10357,7 @@
           <a:lstStyle/>
           <a:p>
             <a:pPr algn="ctr"/>
+            <a:endParaRPr/>
           </a:p>
         </p:txBody>
       </p:sp>
@@ -10134,6 +10437,7 @@
           <a:lstStyle/>
           <a:p>
             <a:pPr algn="ctr"/>
+            <a:endParaRPr/>
           </a:p>
         </p:txBody>
       </p:sp>
@@ -10330,7 +10634,7 @@
 </file>
 
 <file path=ppt/slides/slide9.xml><?xml version="1.0" encoding="utf-8"?>
-<p:sld xmlns:a="http://schemas.openxmlformats.org/drawingml/2006/main" xmlns:p="http://schemas.openxmlformats.org/presentationml/2006/main" xmlns:r="http://schemas.openxmlformats.org/officeDocument/2006/relationships">
+<p:sld xmlns:a="http://schemas.openxmlformats.org/drawingml/2006/main" xmlns:r="http://schemas.openxmlformats.org/officeDocument/2006/relationships" xmlns:p="http://schemas.openxmlformats.org/presentationml/2006/main">
   <p:cSld>
     <p:bg>
       <p:bgPr>
@@ -10346,7 +10650,14 @@
         <p:cNvGrpSpPr/>
         <p:nvPr/>
       </p:nvGrpSpPr>
-      <p:grpSpPr/>
+      <p:grpSpPr>
+        <a:xfrm>
+          <a:off x="0" y="0"/>
+          <a:ext cx="0" cy="0"/>
+          <a:chOff x="0" y="0"/>
+          <a:chExt cx="0" cy="0"/>
+        </a:xfrm>
+      </p:grpSpPr>
       <p:sp>
         <p:nvSpPr>
           <p:cNvPr id="2" name="Rectangle 1"/>
@@ -10387,6 +10698,7 @@
           <a:lstStyle/>
           <a:p>
             <a:pPr algn="ctr"/>
+            <a:endParaRPr/>
           </a:p>
         </p:txBody>
       </p:sp>
@@ -10466,6 +10778,7 @@
           <a:lstStyle/>
           <a:p>
             <a:pPr algn="ctr"/>
+            <a:endParaRPr/>
           </a:p>
         </p:txBody>
       </p:sp>
